--- a/labs/lab06/presentation/output/os-intro-lab06-presentation.pptx
+++ b/labs/lab06/presentation/output/os-intro-lab06-presentation.pptx
@@ -3146,7 +3146,7 @@
             </a:pPr>
             <a:r>
               <a:rPr/>
-              <a:t>Лабораторная работа №5</a:t>
+              <a:t>Лабораторная работа №6</a:t>
             </a:r>
           </a:p>
         </p:txBody>
@@ -3176,13 +3176,7 @@
             </a:pPr>
             <a:r>
               <a:rPr/>
-              <a:t>Менеджер паролей </a:t>
-            </a:r>
-            <a:r>
-              <a:rPr>
-                <a:latin typeface="Courier"/>
-              </a:rPr>
-              <a:t>pass</a:t>
+              <a:t>по курсу: Архитектура компьютера и опреационные системы</a:t>
             </a:r>
             <a:br/>
             <a:br/>
@@ -3213,7 +3207,7 @@
             </a:pPr>
             <a:r>
               <a:rPr/>
-              <a:t>2026-03-19</a:t>
+              <a:t>2026-03-20</a:t>
             </a:r>
           </a:p>
         </p:txBody>
